--- a/Presentation/presentation.pptx
+++ b/Presentation/presentation.pptx
@@ -200,7 +200,7 @@
           <a:p>
             <a:fld id="{DCD81C89-AC0D-4BFF-9223-D3157C1DDC5B}" type="datetimeFigureOut">
               <a:rPr lang="en-US" smtClean="0"/>
-              <a:t>6/8/2026</a:t>
+              <a:t>6/9/2026</a:t>
             </a:fld>
             <a:endParaRPr lang="en-US" dirty="0"/>
           </a:p>
@@ -465,6 +465,90 @@
     </a:lvl9pPr>
   </p:notesStyle>
 </p:notesMaster>
+</file>
+
+<file path=ppt/notesSlides/notesSlide1.xml><?xml version="1.0" encoding="utf-8"?>
+<p:notes xmlns:a="http://schemas.openxmlformats.org/drawingml/2006/main" xmlns:r="http://schemas.openxmlformats.org/officeDocument/2006/relationships" xmlns:p="http://schemas.openxmlformats.org/presentationml/2006/main">
+  <p:cSld>
+    <p:spTree>
+      <p:nvGrpSpPr>
+        <p:cNvPr id="1" name=""/>
+        <p:cNvGrpSpPr/>
+        <p:nvPr/>
+      </p:nvGrpSpPr>
+      <p:grpSpPr>
+        <a:xfrm>
+          <a:off x="0" y="0"/>
+          <a:ext cx="0" cy="0"/>
+          <a:chOff x="0" y="0"/>
+          <a:chExt cx="0" cy="0"/>
+        </a:xfrm>
+      </p:grpSpPr>
+      <p:sp>
+        <p:nvSpPr>
+          <p:cNvPr id="2" name="Slide Image Placeholder 1"/>
+          <p:cNvSpPr>
+            <a:spLocks noGrp="1" noRot="1" noChangeAspect="1"/>
+          </p:cNvSpPr>
+          <p:nvPr>
+            <p:ph type="sldImg"/>
+          </p:nvPr>
+        </p:nvSpPr>
+        <p:spPr/>
+      </p:sp>
+      <p:sp>
+        <p:nvSpPr>
+          <p:cNvPr id="3" name="Notes Placeholder 2"/>
+          <p:cNvSpPr>
+            <a:spLocks noGrp="1"/>
+          </p:cNvSpPr>
+          <p:nvPr>
+            <p:ph type="body" idx="1"/>
+          </p:nvPr>
+        </p:nvSpPr>
+        <p:spPr/>
+        <p:txBody>
+          <a:bodyPr/>
+          <a:lstStyle/>
+          <a:p>
+            <a:endParaRPr lang="en-US" dirty="0"/>
+          </a:p>
+        </p:txBody>
+      </p:sp>
+      <p:sp>
+        <p:nvSpPr>
+          <p:cNvPr id="4" name="Slide Number Placeholder 3"/>
+          <p:cNvSpPr>
+            <a:spLocks noGrp="1"/>
+          </p:cNvSpPr>
+          <p:nvPr>
+            <p:ph type="sldNum" sz="quarter" idx="5"/>
+          </p:nvPr>
+        </p:nvSpPr>
+        <p:spPr/>
+        <p:txBody>
+          <a:bodyPr/>
+          <a:lstStyle/>
+          <a:p>
+            <a:fld id="{3733D7A2-C585-48BF-BF8C-C21FDC051F77}" type="slidenum">
+              <a:rPr lang="en-US" smtClean="0"/>
+              <a:t>1</a:t>
+            </a:fld>
+            <a:endParaRPr lang="en-US" dirty="0"/>
+          </a:p>
+        </p:txBody>
+      </p:sp>
+    </p:spTree>
+    <p:extLst>
+      <p:ext uri="{BB962C8B-B14F-4D97-AF65-F5344CB8AC3E}">
+        <p14:creationId xmlns:p14="http://schemas.microsoft.com/office/powerpoint/2010/main" val="33435364"/>
+      </p:ext>
+    </p:extLst>
+  </p:cSld>
+  <p:clrMapOvr>
+    <a:masterClrMapping/>
+  </p:clrMapOvr>
+</p:notes>
 </file>
 
 <file path=ppt/slideLayouts/slideLayout1.xml><?xml version="1.0" encoding="utf-8"?>
@@ -1021,7 +1105,7 @@
           <a:p>
             <a:fld id="{E7B41ED8-AC2E-4560-8CC9-E6292DDF25B6}" type="datetime1">
               <a:rPr lang="en-US" smtClean="0"/>
-              <a:t>6/8/2026</a:t>
+              <a:t>6/9/2026</a:t>
             </a:fld>
             <a:endParaRPr lang="en-US" dirty="0"/>
           </a:p>
@@ -1526,7 +1610,7 @@
           <a:p>
             <a:fld id="{E7B41ED8-AC2E-4560-8CC9-E6292DDF25B6}" type="datetime1">
               <a:rPr lang="en-US" smtClean="0"/>
-              <a:t>6/8/2026</a:t>
+              <a:t>6/9/2026</a:t>
             </a:fld>
             <a:endParaRPr lang="en-US" dirty="0"/>
           </a:p>
@@ -2360,7 +2444,7 @@
           <a:p>
             <a:fld id="{E7B41ED8-AC2E-4560-8CC9-E6292DDF25B6}" type="datetime1">
               <a:rPr lang="en-US" smtClean="0"/>
-              <a:t>6/8/2026</a:t>
+              <a:t>6/9/2026</a:t>
             </a:fld>
             <a:endParaRPr lang="en-US" dirty="0"/>
           </a:p>
@@ -2609,7 +2693,7 @@
           <a:p>
             <a:fld id="{E7B41ED8-AC2E-4560-8CC9-E6292DDF25B6}" type="datetime1">
               <a:rPr lang="en-US" smtClean="0"/>
-              <a:t>6/8/2026</a:t>
+              <a:t>6/9/2026</a:t>
             </a:fld>
             <a:endParaRPr lang="en-US" dirty="0"/>
           </a:p>
@@ -2929,7 +3013,7 @@
           <a:p>
             <a:fld id="{E7B41ED8-AC2E-4560-8CC9-E6292DDF25B6}" type="datetime1">
               <a:rPr lang="en-US" smtClean="0"/>
-              <a:t>6/8/2026</a:t>
+              <a:t>6/9/2026</a:t>
             </a:fld>
             <a:endParaRPr lang="en-US" dirty="0"/>
           </a:p>
@@ -3145,7 +3229,7 @@
           <a:p>
             <a:fld id="{E7B41ED8-AC2E-4560-8CC9-E6292DDF25B6}" type="datetime1">
               <a:rPr lang="en-US" smtClean="0"/>
-              <a:t>6/8/2026</a:t>
+              <a:t>6/9/2026</a:t>
             </a:fld>
             <a:endParaRPr lang="en-US" dirty="0"/>
           </a:p>
@@ -3548,7 +3632,7 @@
           <a:p>
             <a:fld id="{5CB83234-995D-4149-8E1E-BC120E9070D5}" type="datetime1">
               <a:rPr lang="en-US" smtClean="0"/>
-              <a:t>6/8/2026</a:t>
+              <a:t>6/9/2026</a:t>
             </a:fld>
             <a:endParaRPr lang="en-US" dirty="0"/>
           </a:p>
@@ -4087,7 +4171,7 @@
           <a:p>
             <a:r>
               <a:rPr lang="en-US" dirty="0"/>
-              <a:t>Customer usage for Churn prediction</a:t>
+              <a:t>To Stay or To Go: Predicting Customer Churn</a:t>
             </a:r>
           </a:p>
         </p:txBody>
@@ -4115,12 +4199,12 @@
           <a:p>
             <a:r>
               <a:rPr lang="en-US" dirty="0"/>
-              <a:t>Charter Data Scientist Contractor Interview</a:t>
-            </a:r>
-          </a:p>
-          <a:p>
-            <a:r>
-              <a:rPr lang="en-US" dirty="0"/>
+              <a:t>Charter Data Scientist Interview</a:t>
+            </a:r>
+          </a:p>
+          <a:p>
+            <a:r>
+              <a:rPr lang="en-US" sz="2400" dirty="0"/>
               <a:t>Joe Nagel</a:t>
             </a:r>
           </a:p>
@@ -4179,7 +4263,7 @@
           <a:p>
             <a:r>
               <a:rPr lang="en-US" dirty="0"/>
-              <a:t>Feature engineering and modeling approach</a:t>
+              <a:t>Feature engineering and modeling Considerations</a:t>
             </a:r>
           </a:p>
         </p:txBody>
@@ -4202,112 +4286,186 @@
         </p:nvSpPr>
         <p:spPr/>
         <p:txBody>
-          <a:bodyPr/>
+          <a:bodyPr>
+            <a:normAutofit fontScale="85000" lnSpcReduction="20000"/>
+          </a:bodyPr>
           <a:lstStyle/>
           <a:p>
+            <a:pPr marL="0" indent="0">
+              <a:buNone/>
+            </a:pPr>
+            <a:r>
+              <a:rPr lang="en-US" sz="3000" b="1" dirty="0"/>
+              <a:t>Goal: Predict churn using customer activity</a:t>
+            </a:r>
+          </a:p>
+          <a:p>
+            <a:pPr marL="0" indent="0">
+              <a:buNone/>
+            </a:pPr>
+            <a:endParaRPr lang="en-US" sz="2600" b="1" dirty="0"/>
+          </a:p>
+          <a:p>
             <a:r>
               <a:rPr lang="en-US" dirty="0"/>
-              <a:t>Feature engineering</a:t>
+              <a:t>Data</a:t>
             </a:r>
           </a:p>
           <a:p>
             <a:pPr lvl="1"/>
             <a:r>
               <a:rPr lang="en-US" dirty="0"/>
-              <a:t>Discuss feature groups</a:t>
-            </a:r>
-          </a:p>
-          <a:p>
+              <a:t>Accounts (price and churn status)</a:t>
+            </a:r>
+          </a:p>
+          <a:p>
+            <a:pPr lvl="1"/>
             <a:r>
               <a:rPr lang="en-US" dirty="0"/>
-              <a:t>Modeling approach</a:t>
+              <a:t>Streams (timing and quality)</a:t>
+            </a:r>
+          </a:p>
+          <a:p>
+            <a:r>
+              <a:rPr lang="en-US" dirty="0"/>
+              <a:t>Customer Churn</a:t>
             </a:r>
           </a:p>
           <a:p>
             <a:pPr lvl="1"/>
             <a:r>
               <a:rPr lang="en-US" dirty="0"/>
-              <a:t>Structural missingness</a:t>
+              <a:t>41% overall</a:t>
             </a:r>
           </a:p>
           <a:p>
             <a:pPr lvl="2"/>
             <a:r>
               <a:rPr lang="en-US" dirty="0"/>
-              <a:t>2 models</a:t>
+              <a:t>63% churn for inactive users</a:t>
             </a:r>
           </a:p>
           <a:p>
             <a:pPr lvl="2"/>
             <a:r>
               <a:rPr lang="en-US" dirty="0"/>
-              <a:t>Model that can account for it</a:t>
+              <a:t>23% churn for active users</a:t>
+            </a:r>
+          </a:p>
+          <a:p>
+            <a:r>
+              <a:rPr lang="en-US" dirty="0"/>
+              <a:t>Feature Engineering</a:t>
             </a:r>
           </a:p>
           <a:p>
             <a:pPr lvl="1"/>
             <a:r>
-              <a:rPr lang="en-US" dirty="0" err="1"/>
-              <a:t>Xgboost</a:t>
-            </a:r>
-            <a:endParaRPr lang="en-US" dirty="0"/>
-          </a:p>
-          <a:p>
-            <a:pPr lvl="2"/>
-            <a:r>
               <a:rPr lang="en-US" dirty="0"/>
-              <a:t>Handles structural missingness</a:t>
-            </a:r>
-          </a:p>
-          <a:p>
-            <a:pPr lvl="2"/>
+              <a:t>Volume</a:t>
+            </a:r>
+          </a:p>
+          <a:p>
+            <a:pPr lvl="1"/>
             <a:r>
               <a:rPr lang="en-US" dirty="0"/>
-              <a:t>Effective for binary prediction</a:t>
-            </a:r>
-          </a:p>
-          <a:p>
-            <a:pPr lvl="2"/>
+              <a:t>Recency</a:t>
+            </a:r>
+          </a:p>
+          <a:p>
+            <a:pPr lvl="1"/>
             <a:r>
               <a:rPr lang="en-US" dirty="0"/>
-              <a:t>Reports variable importance</a:t>
-            </a:r>
-          </a:p>
-          <a:p>
-            <a:pPr lvl="2"/>
+              <a:t>Quality</a:t>
+            </a:r>
+          </a:p>
+          <a:p>
+            <a:pPr lvl="1"/>
             <a:r>
               <a:rPr lang="en-US" dirty="0"/>
-              <a:t>Objective function: </a:t>
-            </a:r>
-            <a:r>
-              <a:rPr lang="en-US" dirty="0" err="1"/>
-              <a:t>roc_auc</a:t>
-            </a:r>
-            <a:endParaRPr lang="en-US" dirty="0"/>
+              <a:t>Value</a:t>
+            </a:r>
+          </a:p>
+          <a:p>
+            <a:r>
+              <a:rPr lang="en-US" dirty="0"/>
+              <a:t>Modeling Considerations</a:t>
+            </a:r>
           </a:p>
           <a:p>
             <a:pPr lvl="1"/>
             <a:r>
               <a:rPr lang="en-US" dirty="0"/>
-              <a:t>Data preparation</a:t>
-            </a:r>
-          </a:p>
-          <a:p>
-            <a:pPr lvl="2"/>
+              <a:t>Binary Classification</a:t>
+            </a:r>
+          </a:p>
+          <a:p>
+            <a:pPr lvl="1"/>
             <a:r>
               <a:rPr lang="en-US" dirty="0"/>
-              <a:t>80/10/10 train test validation split</a:t>
-            </a:r>
-          </a:p>
-          <a:p>
-            <a:pPr lvl="3"/>
-            <a:r>
-              <a:rPr lang="en-US" dirty="0"/>
-              <a:t>Stratified by </a:t>
-            </a:r>
-          </a:p>
-        </p:txBody>
-      </p:sp>
+              <a:t>Structural Missingness in Data</a:t>
+            </a:r>
+          </a:p>
+          <a:p>
+            <a:pPr lvl="1"/>
+            <a:endParaRPr lang="en-US" dirty="0"/>
+          </a:p>
+          <a:p>
+            <a:pPr lvl="1"/>
+            <a:endParaRPr lang="en-US" dirty="0"/>
+          </a:p>
+          <a:p>
+            <a:pPr lvl="1"/>
+            <a:endParaRPr lang="en-US" dirty="0"/>
+          </a:p>
+          <a:p>
+            <a:pPr lvl="1"/>
+            <a:endParaRPr lang="en-US" dirty="0"/>
+          </a:p>
+        </p:txBody>
+      </p:sp>
+      <p:pic>
+        <p:nvPicPr>
+          <p:cNvPr id="4" name="Picture 3">
+            <a:extLst>
+              <a:ext uri="{FF2B5EF4-FFF2-40B4-BE49-F238E27FC236}">
+                <a16:creationId xmlns:a16="http://schemas.microsoft.com/office/drawing/2014/main" id="{4D86EC56-146A-794F-FA50-F665C483B56D}"/>
+              </a:ext>
+            </a:extLst>
+          </p:cNvPr>
+          <p:cNvPicPr>
+            <a:picLocks noChangeAspect="1"/>
+          </p:cNvPicPr>
+          <p:nvPr/>
+        </p:nvPicPr>
+        <p:blipFill>
+          <a:blip r:embed="rId2">
+            <a:clrChange>
+              <a:clrFrom>
+                <a:srgbClr val="FFFFFF"/>
+              </a:clrFrom>
+              <a:clrTo>
+                <a:srgbClr val="FFFFFF">
+                  <a:alpha val="0"/>
+                </a:srgbClr>
+              </a:clrTo>
+            </a:clrChange>
+          </a:blip>
+          <a:srcRect t="-365" b="-42"/>
+          <a:stretch>
+            <a:fillRect/>
+          </a:stretch>
+        </p:blipFill>
+        <p:spPr>
+          <a:xfrm>
+            <a:off x="1358291" y="2851265"/>
+            <a:ext cx="4737709" cy="3595255"/>
+          </a:xfrm>
+          <a:prstGeom prst="rect">
+            <a:avLst/>
+          </a:prstGeom>
+        </p:spPr>
+      </p:pic>
     </p:spTree>
     <p:extLst>
       <p:ext uri="{BB962C8B-B14F-4D97-AF65-F5344CB8AC3E}">
@@ -4361,7 +4519,7 @@
           <a:p>
             <a:r>
               <a:rPr lang="en-US" dirty="0"/>
-              <a:t>Modeling results and prediction performance</a:t>
+              <a:t>Model and prediction performance</a:t>
             </a:r>
           </a:p>
         </p:txBody>
@@ -4384,20 +4542,172 @@
         </p:nvSpPr>
         <p:spPr/>
         <p:txBody>
-          <a:bodyPr/>
+          <a:bodyPr>
+            <a:normAutofit fontScale="92500" lnSpcReduction="20000"/>
+          </a:bodyPr>
           <a:lstStyle/>
           <a:p>
             <a:r>
               <a:rPr lang="en-US" dirty="0" err="1"/>
-              <a:t>Predicion</a:t>
+              <a:t>XGBoost</a:t>
             </a:r>
             <a:r>
               <a:rPr lang="en-US" dirty="0"/>
-              <a:t> results</a:t>
-            </a:r>
-          </a:p>
-        </p:txBody>
-      </p:sp>
+              <a:t> Classifier</a:t>
+            </a:r>
+          </a:p>
+          <a:p>
+            <a:pPr lvl="1"/>
+            <a:r>
+              <a:rPr lang="en-US" dirty="0"/>
+              <a:t>Data Split: 80%/10%/10%</a:t>
+            </a:r>
+          </a:p>
+          <a:p>
+            <a:pPr lvl="2"/>
+            <a:r>
+              <a:rPr lang="en-US" dirty="0"/>
+              <a:t>Stratified by churn status</a:t>
+            </a:r>
+          </a:p>
+          <a:p>
+            <a:pPr lvl="1"/>
+            <a:r>
+              <a:rPr lang="en-US" dirty="0"/>
+              <a:t>Objective: Precision-Recall AUC</a:t>
+            </a:r>
+          </a:p>
+          <a:p>
+            <a:pPr lvl="1"/>
+            <a:r>
+              <a:rPr lang="en-US" dirty="0"/>
+              <a:t>Randomized Hyperparameter Tuning</a:t>
+            </a:r>
+          </a:p>
+          <a:p>
+            <a:pPr lvl="1"/>
+            <a:r>
+              <a:rPr lang="en-US" dirty="0"/>
+              <a:t>Validation Based Early Stopping</a:t>
+            </a:r>
+          </a:p>
+          <a:p>
+            <a:r>
+              <a:rPr lang="en-US" dirty="0"/>
+              <a:t>Performance</a:t>
+            </a:r>
+          </a:p>
+          <a:p>
+            <a:pPr lvl="1"/>
+            <a:r>
+              <a:rPr lang="en-US" dirty="0"/>
+              <a:t>PR-AUC: 0.75</a:t>
+            </a:r>
+          </a:p>
+          <a:p>
+            <a:pPr lvl="1"/>
+            <a:r>
+              <a:rPr lang="en-US" dirty="0"/>
+              <a:t>F1-Score: 0.80</a:t>
+            </a:r>
+          </a:p>
+          <a:p>
+            <a:pPr lvl="1"/>
+            <a:r>
+              <a:rPr lang="en-US" dirty="0"/>
+              <a:t>Precision: 0.73</a:t>
+            </a:r>
+          </a:p>
+          <a:p>
+            <a:pPr lvl="1"/>
+            <a:r>
+              <a:rPr lang="en-US" dirty="0"/>
+              <a:t>Recall: 0.88</a:t>
+            </a:r>
+          </a:p>
+          <a:p>
+            <a:pPr lvl="1"/>
+            <a:r>
+              <a:rPr lang="en-US" dirty="0"/>
+              <a:t>Accuracy: 0.81</a:t>
+            </a:r>
+          </a:p>
+          <a:p>
+            <a:r>
+              <a:rPr lang="en-US" dirty="0"/>
+              <a:t>Feature Importance</a:t>
+            </a:r>
+          </a:p>
+          <a:p>
+            <a:pPr lvl="1"/>
+            <a:r>
+              <a:rPr lang="en-US" dirty="0"/>
+              <a:t>Recency &gt;&gt;&gt; Volume Quality Value</a:t>
+            </a:r>
+          </a:p>
+          <a:p>
+            <a:r>
+              <a:rPr lang="en-US" dirty="0"/>
+              <a:t>Future Work</a:t>
+            </a:r>
+          </a:p>
+          <a:p>
+            <a:pPr lvl="1" fontAlgn="t"/>
+            <a:r>
+              <a:rPr lang="en-US" dirty="0"/>
+              <a:t>Build separate models based on activity level</a:t>
+            </a:r>
+          </a:p>
+          <a:p>
+            <a:pPr lvl="1"/>
+            <a:r>
+              <a:rPr lang="en-US" dirty="0"/>
+              <a:t>Measure changes in user behavior over time</a:t>
+            </a:r>
+          </a:p>
+        </p:txBody>
+      </p:sp>
+      <p:pic>
+        <p:nvPicPr>
+          <p:cNvPr id="9" name="Picture 8">
+            <a:extLst>
+              <a:ext uri="{FF2B5EF4-FFF2-40B4-BE49-F238E27FC236}">
+                <a16:creationId xmlns:a16="http://schemas.microsoft.com/office/drawing/2014/main" id="{4ECD4009-CD35-6097-AEA0-6E9CB6DDC3E4}"/>
+              </a:ext>
+            </a:extLst>
+          </p:cNvPr>
+          <p:cNvPicPr>
+            <a:picLocks noChangeAspect="1"/>
+          </p:cNvPicPr>
+          <p:nvPr/>
+        </p:nvPicPr>
+        <p:blipFill>
+          <a:blip r:embed="rId2">
+            <a:clrChange>
+              <a:clrFrom>
+                <a:srgbClr val="FFFFFF"/>
+              </a:clrFrom>
+              <a:clrTo>
+                <a:srgbClr val="FFFFFF">
+                  <a:alpha val="0"/>
+                </a:srgbClr>
+              </a:clrTo>
+            </a:clrChange>
+          </a:blip>
+          <a:stretch>
+            <a:fillRect/>
+          </a:stretch>
+        </p:blipFill>
+        <p:spPr>
+          <a:xfrm>
+            <a:off x="1371600" y="2828042"/>
+            <a:ext cx="3725430" cy="3817216"/>
+          </a:xfrm>
+          <a:prstGeom prst="rect">
+            <a:avLst/>
+          </a:prstGeom>
+        </p:spPr>
+      </p:pic>
     </p:spTree>
     <p:extLst>
       <p:ext uri="{BB962C8B-B14F-4D97-AF65-F5344CB8AC3E}">
@@ -4474,13 +4784,169 @@
         </p:nvSpPr>
         <p:spPr/>
         <p:txBody>
-          <a:bodyPr/>
+          <a:bodyPr>
+            <a:normAutofit/>
+          </a:bodyPr>
           <a:lstStyle/>
           <a:p>
-            <a:endParaRPr lang="en-US"/>
-          </a:p>
-        </p:txBody>
-      </p:sp>
+            <a:r>
+              <a:rPr lang="en-US" dirty="0"/>
+              <a:t>AI Usage</a:t>
+            </a:r>
+          </a:p>
+          <a:p>
+            <a:pPr lvl="1"/>
+            <a:r>
+              <a:rPr lang="en-US" dirty="0"/>
+              <a:t>Coding</a:t>
+            </a:r>
+          </a:p>
+          <a:p>
+            <a:pPr lvl="2"/>
+            <a:r>
+              <a:rPr lang="en-US" dirty="0"/>
+              <a:t>Double checking implementation</a:t>
+            </a:r>
+          </a:p>
+          <a:p>
+            <a:pPr lvl="2"/>
+            <a:r>
+              <a:rPr lang="en-US" dirty="0"/>
+              <a:t>Troubleshooting errors</a:t>
+            </a:r>
+          </a:p>
+          <a:p>
+            <a:pPr lvl="1"/>
+            <a:r>
+              <a:rPr lang="en-US" dirty="0"/>
+              <a:t>Modeling</a:t>
+            </a:r>
+          </a:p>
+          <a:p>
+            <a:pPr lvl="2" fontAlgn="t"/>
+            <a:r>
+              <a:rPr lang="en-US" dirty="0"/>
+              <a:t>Feature suggestion</a:t>
+            </a:r>
+          </a:p>
+          <a:p>
+            <a:pPr lvl="2"/>
+            <a:r>
+              <a:rPr lang="en-US" dirty="0"/>
+              <a:t>Initial value selection</a:t>
+            </a:r>
+          </a:p>
+          <a:p>
+            <a:pPr lvl="1"/>
+            <a:r>
+              <a:rPr lang="en-US" dirty="0"/>
+              <a:t>Communication</a:t>
+            </a:r>
+          </a:p>
+          <a:p>
+            <a:pPr lvl="2"/>
+            <a:r>
+              <a:rPr lang="en-US" dirty="0"/>
+              <a:t>Presentation outline</a:t>
+            </a:r>
+          </a:p>
+          <a:p>
+            <a:pPr lvl="2"/>
+            <a:r>
+              <a:rPr lang="en-US" dirty="0"/>
+              <a:t>Refining visualizations</a:t>
+            </a:r>
+          </a:p>
+          <a:p>
+            <a:r>
+              <a:rPr lang="en-US" dirty="0"/>
+              <a:t>Implemented in Python</a:t>
+            </a:r>
+          </a:p>
+          <a:p>
+            <a:pPr lvl="1"/>
+            <a:r>
+              <a:rPr lang="en-US" dirty="0"/>
+              <a:t>Polars</a:t>
+            </a:r>
+          </a:p>
+          <a:p>
+            <a:pPr lvl="1"/>
+            <a:r>
+              <a:rPr lang="en-US" dirty="0" err="1"/>
+              <a:t>XGBoost</a:t>
+            </a:r>
+            <a:endParaRPr lang="en-US" dirty="0"/>
+          </a:p>
+          <a:p>
+            <a:pPr lvl="1"/>
+            <a:r>
+              <a:rPr lang="en-US" dirty="0"/>
+              <a:t>scikit-learn</a:t>
+            </a:r>
+          </a:p>
+          <a:p>
+            <a:r>
+              <a:rPr lang="en-US" dirty="0">
+                <a:hlinkClick r:id="rId2"/>
+              </a:rPr>
+              <a:t>github.com/nageljo/</a:t>
+            </a:r>
+            <a:r>
+              <a:rPr lang="en-US" dirty="0" err="1">
+                <a:hlinkClick r:id="rId2"/>
+              </a:rPr>
+              <a:t>CharterInterview</a:t>
+            </a:r>
+            <a:r>
+              <a:rPr lang="en-US" dirty="0"/>
+              <a:t> </a:t>
+            </a:r>
+          </a:p>
+        </p:txBody>
+      </p:sp>
+      <p:pic>
+        <p:nvPicPr>
+          <p:cNvPr id="4" name="Picture 3" descr="Google Gemini - Review 2026 - PCMag Middle East">
+            <a:extLst>
+              <a:ext uri="{FF2B5EF4-FFF2-40B4-BE49-F238E27FC236}">
+                <a16:creationId xmlns:a16="http://schemas.microsoft.com/office/drawing/2014/main" id="{57D36838-7F5D-9B83-1009-03E0DD064332}"/>
+              </a:ext>
+            </a:extLst>
+          </p:cNvPr>
+          <p:cNvPicPr>
+            <a:picLocks noChangeAspect="1"/>
+          </p:cNvPicPr>
+          <p:nvPr/>
+        </p:nvPicPr>
+        <p:blipFill>
+          <a:blip r:embed="rId3">
+            <a:clrChange>
+              <a:clrFrom>
+                <a:srgbClr val="FFFFFF"/>
+              </a:clrFrom>
+              <a:clrTo>
+                <a:srgbClr val="FFFFFF">
+                  <a:alpha val="0"/>
+                </a:srgbClr>
+              </a:clrTo>
+            </a:clrChange>
+          </a:blip>
+          <a:srcRect l="16881" t="35420" r="16687" b="36288"/>
+          <a:stretch>
+            <a:fillRect/>
+          </a:stretch>
+        </p:blipFill>
+        <p:spPr>
+          <a:xfrm>
+            <a:off x="941140" y="2903453"/>
+            <a:ext cx="5154860" cy="1234912"/>
+          </a:xfrm>
+          <a:prstGeom prst="rect">
+            <a:avLst/>
+          </a:prstGeom>
+        </p:spPr>
+      </p:pic>
     </p:spTree>
     <p:extLst>
       <p:ext uri="{BB962C8B-B14F-4D97-AF65-F5344CB8AC3E}">
